--- a/data/outputs/v2/Biology/SS1.2_Chemicals_of_Life/quiz/Biology_G10_SS1.2_Chemicals_of_Life_L5_QuickCheck.pptx
+++ b/data/outputs/v2/Biology/SS1.2_Chemicals_of_Life/quiz/Biology_G10_SS1.2_Chemicals_of_Life_L5_QuickCheck.pptx
@@ -1698,7 +1698,7 @@
                 <a:ea typeface="Arial" pitchFamily="34" charset="-122"/>
                 <a:cs typeface="Arial" pitchFamily="34" charset="-120"/>
               </a:rPr>
-              <a:t>Lesson 5: Sensemaking: Connecting the Chemistry of Food to Health Outcomes in Kisumu</a:t>
+              <a:t>Lesson 5: Water, Mineral Salts and Enzymes in Digestion</a:t>
             </a:r>
             <a:endParaRPr lang="en-US" sz="2000" dirty="0"/>
           </a:p>
@@ -2013,7 +2013,7 @@
               <a:buNone/>
             </a:pPr>
             <a:r>
-              <a:rPr lang="en-US" sz="1800" b="1" dirty="0">
+              <a:rPr lang="en-US" sz="2000" b="1" dirty="0">
                 <a:solidFill>
                   <a:srgbClr val="FFFFFF"/>
                 </a:solidFill>
@@ -2021,9 +2021,9 @@
                 <a:ea typeface="Arial" pitchFamily="34" charset="-122"/>
                 <a:cs typeface="Arial" pitchFamily="34" charset="-120"/>
               </a:rPr>
-              <a:t>Two children in a village in Kisumu eat the same amount of food each day. One eats only ugali (maize starch). The other eats githeri (maize and beans). Based on food test results, what is the most important chemical difference between ugali and githeri?</a:t>
-            </a:r>
-            <a:endParaRPr lang="en-US" sz="1800" dirty="0"/>
+              <a:t>Wanjiru's blood glucose rose from 4.5 to 8.0 mmol/L after she ate ugali, which is mostly starch. Why must starch be digested before it can raise her blood glucose?</a:t>
+            </a:r>
+            <a:endParaRPr lang="en-US" sz="2000" dirty="0"/>
           </a:p>
         </p:txBody>
       </p:sp>
@@ -2121,7 +2121,7 @@
                 <a:ea typeface="Arial" pitchFamily="34" charset="-122"/>
                 <a:cs typeface="Arial" pitchFamily="34" charset="-120"/>
               </a:rPr>
-              <a:t>Githeri contains protein as well as carbohydrate, but ugali is mainly carbohydrate</a:t>
+              <a:t>Starch is a very large insoluble molecule and must be broken down into small soluble sugars first</a:t>
             </a:r>
             <a:endParaRPr lang="en-US" sz="1500" dirty="0"/>
           </a:p>
@@ -2221,7 +2221,7 @@
                 <a:ea typeface="Arial" pitchFamily="34" charset="-122"/>
                 <a:cs typeface="Arial" pitchFamily="34" charset="-120"/>
               </a:rPr>
-              <a:t>Ugali contains protein, but githeri does not</a:t>
+              <a:t>Starch is already glucose, but it needs to be warmed to 37 degrees C first</a:t>
             </a:r>
             <a:endParaRPr lang="en-US" sz="1500" dirty="0"/>
           </a:p>
@@ -2321,7 +2321,7 @@
                 <a:ea typeface="Arial" pitchFamily="34" charset="-122"/>
                 <a:cs typeface="Arial" pitchFamily="34" charset="-120"/>
               </a:rPr>
-              <a:t>Ugali contains more food than githeri, so it gives less energy</a:t>
+              <a:t>Starch turns directly into blood once it is swallowed</a:t>
             </a:r>
             <a:endParaRPr lang="en-US" sz="1500" dirty="0"/>
           </a:p>
@@ -2421,7 +2421,7 @@
                 <a:ea typeface="Arial" pitchFamily="34" charset="-122"/>
                 <a:cs typeface="Arial" pitchFamily="34" charset="-120"/>
               </a:rPr>
-              <a:t>Githeri contains no carbohydrates, but ugali does</a:t>
+              <a:t>Saliva only makes the food wet so it can be swallowed, and this is all that is needed</a:t>
             </a:r>
             <a:endParaRPr lang="en-US" sz="1500" dirty="0"/>
           </a:p>
@@ -2623,7 +2623,7 @@
               <a:buNone/>
             </a:pPr>
             <a:r>
-              <a:rPr lang="en-US" sz="2300" b="1" dirty="0">
+              <a:rPr lang="en-US" sz="2000" b="1" dirty="0">
                 <a:solidFill>
                   <a:srgbClr val="FFFFFF"/>
                 </a:solidFill>
@@ -2631,9 +2631,9 @@
                 <a:ea typeface="Arial" pitchFamily="34" charset="-122"/>
                 <a:cs typeface="Arial" pitchFamily="34" charset="-120"/>
               </a:rPr>
-              <a:t>In a Biuret test, a bean extract turns purple and a sample of ugali stays blue. What does this result show?</a:t>
-            </a:r>
-            <a:endParaRPr lang="en-US" sz="2300" dirty="0"/>
+              <a:t>In an investigation, tube A has starch and saliva. Tube B has starch and boiled saliva. Both are kept at about 37 degrees C. Why is tube B included?</a:t>
+            </a:r>
+            <a:endParaRPr lang="en-US" sz="2000" dirty="0"/>
           </a:p>
         </p:txBody>
       </p:sp>
@@ -2723,7 +2723,7 @@
               <a:buNone/>
             </a:pPr>
             <a:r>
-              <a:rPr lang="en-US" sz="1700" dirty="0">
+              <a:rPr lang="en-US" sz="1500" dirty="0">
                 <a:solidFill>
                   <a:srgbClr val="FFFFFF"/>
                 </a:solidFill>
@@ -2731,9 +2731,9 @@
                 <a:ea typeface="Arial" pitchFamily="34" charset="-122"/>
                 <a:cs typeface="Arial" pitchFamily="34" charset="-120"/>
               </a:rPr>
-              <a:t>Beans contain starch and ugali does not</a:t>
-            </a:r>
-            <a:endParaRPr lang="en-US" sz="1700" dirty="0"/>
+              <a:t>To make sure there is more liquid to test with iodine</a:t>
+            </a:r>
+            <a:endParaRPr lang="en-US" sz="1500" dirty="0"/>
           </a:p>
         </p:txBody>
       </p:sp>
@@ -2823,7 +2823,7 @@
               <a:buNone/>
             </a:pPr>
             <a:r>
-              <a:rPr lang="en-US" sz="1700" dirty="0">
+              <a:rPr lang="en-US" sz="1500" dirty="0">
                 <a:solidFill>
                   <a:srgbClr val="FFFFFF"/>
                 </a:solidFill>
@@ -2831,9 +2831,9 @@
                 <a:ea typeface="Arial" pitchFamily="34" charset="-122"/>
                 <a:cs typeface="Arial" pitchFamily="34" charset="-120"/>
               </a:rPr>
-              <a:t>Ugali contains more lipids than beans</a:t>
-            </a:r>
-            <a:endParaRPr lang="en-US" sz="1700" dirty="0"/>
+              <a:t>To show that boiled saliva digests starch faster than fresh saliva</a:t>
+            </a:r>
+            <a:endParaRPr lang="en-US" sz="1500" dirty="0"/>
           </a:p>
         </p:txBody>
       </p:sp>
@@ -2923,7 +2923,7 @@
               <a:buNone/>
             </a:pPr>
             <a:r>
-              <a:rPr lang="en-US" sz="1700" dirty="0">
+              <a:rPr lang="en-US" sz="1500" dirty="0">
                 <a:solidFill>
                   <a:srgbClr val="FFFFFF"/>
                 </a:solidFill>
@@ -2931,9 +2931,9 @@
                 <a:ea typeface="Arial" pitchFamily="34" charset="-122"/>
                 <a:cs typeface="Arial" pitchFamily="34" charset="-120"/>
               </a:rPr>
-              <a:t>Beans contain vitamin C and ugali does not</a:t>
-            </a:r>
-            <a:endParaRPr lang="en-US" sz="1700" dirty="0"/>
+              <a:t>To test whether Benedict's solution can change colour without heating</a:t>
+            </a:r>
+            <a:endParaRPr lang="en-US" sz="1500" dirty="0"/>
           </a:p>
         </p:txBody>
       </p:sp>
@@ -3023,7 +3023,7 @@
               <a:buNone/>
             </a:pPr>
             <a:r>
-              <a:rPr lang="en-US" sz="1700" dirty="0">
+              <a:rPr lang="en-US" sz="1500" dirty="0">
                 <a:solidFill>
                   <a:srgbClr val="FFFFFF"/>
                 </a:solidFill>
@@ -3031,9 +3031,9 @@
                 <a:ea typeface="Arial" pitchFamily="34" charset="-122"/>
                 <a:cs typeface="Arial" pitchFamily="34" charset="-120"/>
               </a:rPr>
-              <a:t>Beans contain protein, while ugali has little or no protein</a:t>
-            </a:r>
-            <a:endParaRPr lang="en-US" sz="1700" dirty="0"/>
+              <a:t>To show that the changes in tube A are caused by active saliva and not by warmth or time alone</a:t>
+            </a:r>
+            <a:endParaRPr lang="en-US" sz="1500" dirty="0"/>
           </a:p>
         </p:txBody>
       </p:sp>
@@ -3233,7 +3233,7 @@
               <a:buNone/>
             </a:pPr>
             <a:r>
-              <a:rPr lang="en-US" sz="2000" b="1" dirty="0">
+              <a:rPr lang="en-US" sz="1800" b="1" dirty="0">
                 <a:solidFill>
                   <a:srgbClr val="FFFFFF"/>
                 </a:solidFill>
@@ -3241,9 +3241,9 @@
                 <a:ea typeface="Arial" pitchFamily="34" charset="-122"/>
                 <a:cs typeface="Arial" pitchFamily="34" charset="-120"/>
               </a:rPr>
-              <a:t>In a diet audit, Child 1 eats ugali three times a day. Child 2 eats githeri twice and ugali once. Which statement about their diets is correct?</a:t>
-            </a:r>
-            <a:endParaRPr lang="en-US" sz="2000" dirty="0"/>
+              <a:t>At 10 minutes, a sample from the tube of starch and fresh saliva at 37 degrees C gives a yellow-brown colour with iodine and a brick-red colour with Benedict's solution after heating. What do these results show?</a:t>
+            </a:r>
+            <a:endParaRPr lang="en-US" sz="1800" dirty="0"/>
           </a:p>
         </p:txBody>
       </p:sp>
@@ -3333,7 +3333,7 @@
               <a:buNone/>
             </a:pPr>
             <a:r>
-              <a:rPr lang="en-US" sz="1500" dirty="0">
+              <a:rPr lang="en-US" sz="1700" dirty="0">
                 <a:solidFill>
                   <a:srgbClr val="FFFFFF"/>
                 </a:solidFill>
@@ -3341,9 +3341,9 @@
                 <a:ea typeface="Arial" pitchFamily="34" charset="-122"/>
                 <a:cs typeface="Arial" pitchFamily="34" charset="-120"/>
               </a:rPr>
-              <a:t>Child 2's diet supplies protein but no carbohydrates</a:t>
-            </a:r>
-            <a:endParaRPr lang="en-US" sz="1500" dirty="0"/>
+              <a:t>Starch is still present, and the saliva has turned into a reducing sugar</a:t>
+            </a:r>
+            <a:endParaRPr lang="en-US" sz="1700" dirty="0"/>
           </a:p>
         </p:txBody>
       </p:sp>
@@ -3433,7 +3433,7 @@
               <a:buNone/>
             </a:pPr>
             <a:r>
-              <a:rPr lang="en-US" sz="1500" dirty="0">
+              <a:rPr lang="en-US" sz="1700" dirty="0">
                 <a:solidFill>
                   <a:srgbClr val="FFFFFF"/>
                 </a:solidFill>
@@ -3441,9 +3441,9 @@
                 <a:ea typeface="Arial" pitchFamily="34" charset="-122"/>
                 <a:cs typeface="Arial" pitchFamily="34" charset="-120"/>
               </a:rPr>
-              <a:t>Child 1's diet supplies carbohydrates but too little protein, and Child 2's diet supplies both</a:t>
-            </a:r>
-            <a:endParaRPr lang="en-US" sz="1500" dirty="0"/>
+              <a:t>Starch has been used up and a reducing sugar is now present</a:t>
+            </a:r>
+            <a:endParaRPr lang="en-US" sz="1700" dirty="0"/>
           </a:p>
         </p:txBody>
       </p:sp>
@@ -3533,7 +3533,7 @@
               <a:buNone/>
             </a:pPr>
             <a:r>
-              <a:rPr lang="en-US" sz="1500" dirty="0">
+              <a:rPr lang="en-US" sz="1700" dirty="0">
                 <a:solidFill>
                   <a:srgbClr val="FFFFFF"/>
                 </a:solidFill>
@@ -3541,9 +3541,9 @@
                 <a:ea typeface="Arial" pitchFamily="34" charset="-122"/>
                 <a:cs typeface="Arial" pitchFamily="34" charset="-120"/>
               </a:rPr>
-              <a:t>Child 1's diet has no carbohydrates, but Child 2's diet has carbohydrates</a:t>
-            </a:r>
-            <a:endParaRPr lang="en-US" sz="1500" dirty="0"/>
+              <a:t>Starch is still present and no sugar has formed</a:t>
+            </a:r>
+            <a:endParaRPr lang="en-US" sz="1700" dirty="0"/>
           </a:p>
         </p:txBody>
       </p:sp>
@@ -3633,7 +3633,7 @@
               <a:buNone/>
             </a:pPr>
             <a:r>
-              <a:rPr lang="en-US" sz="1500" dirty="0">
+              <a:rPr lang="en-US" sz="1700" dirty="0">
                 <a:solidFill>
                   <a:srgbClr val="FFFFFF"/>
                 </a:solidFill>
@@ -3641,9 +3641,9 @@
                 <a:ea typeface="Arial" pitchFamily="34" charset="-122"/>
                 <a:cs typeface="Arial" pitchFamily="34" charset="-120"/>
               </a:rPr>
-              <a:t>Both diets supply the same chemicals of life because they contain the same amount of food</a:t>
-            </a:r>
-            <a:endParaRPr lang="en-US" sz="1500" dirty="0"/>
+              <a:t>Starch has increased and Benedict's solution has turned it into protein</a:t>
+            </a:r>
+            <a:endParaRPr lang="en-US" sz="1700" dirty="0"/>
           </a:p>
         </p:txBody>
       </p:sp>
@@ -3812,7 +3812,7 @@
                 <a:ea typeface="Arial" pitchFamily="34" charset="-122"/>
                 <a:cs typeface="Arial" pitchFamily="34" charset="-120"/>
               </a:rPr>
-              <a:t>Use after: Observe phase</a:t>
+              <a:t>Use after: Explain phase</a:t>
             </a:r>
             <a:endParaRPr lang="en-US" sz="1100" dirty="0"/>
           </a:p>
@@ -3851,7 +3851,7 @@
                 <a:ea typeface="Arial" pitchFamily="34" charset="-122"/>
                 <a:cs typeface="Arial" pitchFamily="34" charset="-120"/>
               </a:rPr>
-              <a:t>A learner tests orange juice with DCPIP in the lab and it changes colour. A disease is caused by a lack of this same chemical in the diet. Which disease is it?</a:t>
+              <a:t>A tube of starch and saliva was boiled before the test and stayed blue-black with iodine after 10 minutes. What is the correct explanation?</a:t>
             </a:r>
             <a:endParaRPr lang="en-US" sz="2000" dirty="0"/>
           </a:p>
@@ -3951,7 +3951,7 @@
                 <a:ea typeface="Arial" pitchFamily="34" charset="-122"/>
                 <a:cs typeface="Arial" pitchFamily="34" charset="-120"/>
               </a:rPr>
-              <a:t>Marasmus</a:t>
+              <a:t>Boiling turned the enzyme into starch</a:t>
             </a:r>
             <a:endParaRPr lang="en-US" sz="1700" dirty="0"/>
           </a:p>
@@ -4051,7 +4051,7 @@
                 <a:ea typeface="Arial" pitchFamily="34" charset="-122"/>
                 <a:cs typeface="Arial" pitchFamily="34" charset="-120"/>
               </a:rPr>
-              <a:t>Kwashiorkor</a:t>
+              <a:t>Boiling made the starch molecules too big to be digested</a:t>
             </a:r>
             <a:endParaRPr lang="en-US" sz="1700" dirty="0"/>
           </a:p>
@@ -4151,7 +4151,7 @@
                 <a:ea typeface="Arial" pitchFamily="34" charset="-122"/>
                 <a:cs typeface="Arial" pitchFamily="34" charset="-120"/>
               </a:rPr>
-              <a:t>Scurvy</a:t>
+              <a:t>Boiling used up all the enzyme by making it work too fast</a:t>
             </a:r>
             <a:endParaRPr lang="en-US" sz="1700" dirty="0"/>
           </a:p>
@@ -4251,7 +4251,7 @@
                 <a:ea typeface="Arial" pitchFamily="34" charset="-122"/>
                 <a:cs typeface="Arial" pitchFamily="34" charset="-120"/>
               </a:rPr>
-              <a:t>Rickets</a:t>
+              <a:t>Boiling denatured the enzyme, so it could no longer digest starch</a:t>
             </a:r>
             <a:endParaRPr lang="en-US" sz="1700" dirty="0"/>
           </a:p>
@@ -4461,7 +4461,7 @@
                 <a:ea typeface="Arial" pitchFamily="34" charset="-122"/>
                 <a:cs typeface="Arial" pitchFamily="34" charset="-120"/>
               </a:rPr>
-              <a:t>A child with kwashiorkor has a swollen belly, thin limbs and discoloured hair. Which row correctly links a symptom to the protein that is lacking?</a:t>
+              <a:t>A tube of starch and fresh saliva is placed in ice at 0 degrees C. After 10 minutes it is still blue-black with iodine. What does this tell us about the enzyme?</a:t>
             </a:r>
             <a:endParaRPr lang="en-US" sz="2000" dirty="0"/>
           </a:p>
@@ -4561,7 +4561,7 @@
                 <a:ea typeface="Arial" pitchFamily="34" charset="-122"/>
                 <a:cs typeface="Arial" pitchFamily="34" charset="-120"/>
               </a:rPr>
-              <a:t>Swollen belly: keratin loss</a:t>
+              <a:t>The enzyme is inactive at this low temperature</a:t>
             </a:r>
             <a:endParaRPr lang="en-US" sz="1700" dirty="0"/>
           </a:p>
@@ -4661,7 +4661,7 @@
                 <a:ea typeface="Arial" pitchFamily="34" charset="-122"/>
                 <a:cs typeface="Arial" pitchFamily="34" charset="-120"/>
               </a:rPr>
-              <a:t>Thin limbs: keratin loss</a:t>
+              <a:t>The enzyme works fastest at 0 degrees C</a:t>
             </a:r>
             <a:endParaRPr lang="en-US" sz="1700" dirty="0"/>
           </a:p>
@@ -4761,7 +4761,7 @@
                 <a:ea typeface="Arial" pitchFamily="34" charset="-122"/>
                 <a:cs typeface="Arial" pitchFamily="34" charset="-120"/>
               </a:rPr>
-              <a:t>Swollen belly: albumin loss</a:t>
+              <a:t>The enzyme is not needed to digest starch</a:t>
             </a:r>
             <a:endParaRPr lang="en-US" sz="1700" dirty="0"/>
           </a:p>
@@ -4861,7 +4861,7 @@
                 <a:ea typeface="Arial" pitchFamily="34" charset="-122"/>
                 <a:cs typeface="Arial" pitchFamily="34" charset="-120"/>
               </a:rPr>
-              <a:t>Discoloured hair: albumin loss</a:t>
+              <a:t>The enzyme has been denatured and destroyed for ever by the cold</a:t>
             </a:r>
             <a:endParaRPr lang="en-US" sz="1700" dirty="0"/>
           </a:p>
@@ -5071,7 +5071,7 @@
                 <a:ea typeface="Arial" pitchFamily="34" charset="-122"/>
                 <a:cs typeface="Arial" pitchFamily="34" charset="-120"/>
               </a:rPr>
-              <a:t>Which statement is the best scientific explanation for why the child who eats only ugali develops kwashiorkor, while the child who eats githeri stays healthy?</a:t>
+              <a:t>Water is an inorganic compound found in the starch solution and in saliva. What is its main role in the digestion of starch?</a:t>
             </a:r>
             <a:endParaRPr lang="en-US" sz="2000" dirty="0"/>
           </a:p>
@@ -5171,7 +5171,7 @@
                 <a:ea typeface="Arial" pitchFamily="34" charset="-122"/>
                 <a:cs typeface="Arial" pitchFamily="34" charset="-120"/>
               </a:rPr>
-              <a:t>The ugali child does not get enough energy because ugali has no carbohydrates</a:t>
+              <a:t>It is the enzyme that breaks starch into sugar</a:t>
             </a:r>
             <a:endParaRPr lang="en-US" sz="1500" dirty="0"/>
           </a:p>
@@ -5271,7 +5271,7 @@
                 <a:ea typeface="Arial" pitchFamily="34" charset="-122"/>
                 <a:cs typeface="Arial" pitchFamily="34" charset="-120"/>
               </a:rPr>
-              <a:t>The ugali child gets enough energy from starch but too little protein for building body tissues</a:t>
+              <a:t>It is the medium in which the enzyme and starch react and in which the digested sugars are carried</a:t>
             </a:r>
             <a:endParaRPr lang="en-US" sz="1500" dirty="0"/>
           </a:p>
@@ -5371,7 +5371,7 @@
                 <a:ea typeface="Arial" pitchFamily="34" charset="-122"/>
                 <a:cs typeface="Arial" pitchFamily="34" charset="-120"/>
               </a:rPr>
-              <a:t>The githeri child gets more vitamins, and vitamins alone build muscle and hair</a:t>
+              <a:t>It makes the enzyme a protein</a:t>
             </a:r>
             <a:endParaRPr lang="en-US" sz="1500" dirty="0"/>
           </a:p>
@@ -5471,7 +5471,7 @@
                 <a:ea typeface="Arial" pitchFamily="34" charset="-122"/>
                 <a:cs typeface="Arial" pitchFamily="34" charset="-120"/>
               </a:rPr>
-              <a:t>The ugali child eats a smaller quantity of food than the githeri child</a:t>
+              <a:t>It changes the iodine from blue-black to yellow-brown</a:t>
             </a:r>
             <a:endParaRPr lang="en-US" sz="1500" dirty="0"/>
           </a:p>
@@ -5673,7 +5673,7 @@
               <a:buNone/>
             </a:pPr>
             <a:r>
-              <a:rPr lang="en-US" sz="2300" b="1" dirty="0">
+              <a:rPr lang="en-US" sz="2000" b="1" dirty="0">
                 <a:solidFill>
                   <a:srgbClr val="FFFFFF"/>
                 </a:solidFill>
@@ -5681,9 +5681,9 @@
                 <a:ea typeface="Arial" pitchFamily="34" charset="-122"/>
                 <a:cs typeface="Arial" pitchFamily="34" charset="-120"/>
               </a:rPr>
-              <a:t>A group is filling in the protein box of their 'Our Chemicals of Life Model' template. Which entry is correct?</a:t>
-            </a:r>
-            <a:endParaRPr lang="en-US" sz="2300" dirty="0"/>
+              <a:t>A group is revising the 'Digestion by enzymes' box in the class model. Which statement about salivary amylase should they write?</a:t>
+            </a:r>
+            <a:endParaRPr lang="en-US" sz="2000" dirty="0"/>
           </a:p>
         </p:txBody>
       </p:sp>
@@ -5773,7 +5773,7 @@
               <a:buNone/>
             </a:pPr>
             <a:r>
-              <a:rPr lang="en-US" sz="1700" dirty="0">
+              <a:rPr lang="en-US" sz="1500" dirty="0">
                 <a:solidFill>
                   <a:srgbClr val="FFFFFF"/>
                 </a:solidFill>
@@ -5781,9 +5781,9 @@
                 <a:ea typeface="Arial" pitchFamily="34" charset="-122"/>
                 <a:cs typeface="Arial" pitchFamily="34" charset="-120"/>
               </a:rPr>
-              <a:t>Food source: orange juice; consequence of deficiency: rickets</a:t>
-            </a:r>
-            <a:endParaRPr lang="en-US" sz="1700" dirty="0"/>
+              <a:t>It is a protein catalyst that speeds up the digestion of starch to maltose, and it is not used up</a:t>
+            </a:r>
+            <a:endParaRPr lang="en-US" sz="1500" dirty="0"/>
           </a:p>
         </p:txBody>
       </p:sp>
@@ -5873,7 +5873,7 @@
               <a:buNone/>
             </a:pPr>
             <a:r>
-              <a:rPr lang="en-US" sz="1700" dirty="0">
+              <a:rPr lang="en-US" sz="1500" dirty="0">
                 <a:solidFill>
                   <a:srgbClr val="FFFFFF"/>
                 </a:solidFill>
@@ -5881,9 +5881,9 @@
                 <a:ea typeface="Arial" pitchFamily="34" charset="-122"/>
                 <a:cs typeface="Arial" pitchFamily="34" charset="-120"/>
               </a:rPr>
-              <a:t>Food source: beans; consequence of deficiency: kwashiorkor</a:t>
-            </a:r>
-            <a:endParaRPr lang="en-US" sz="1700" dirty="0"/>
+              <a:t>It is a lipid that stores energy in the mouth</a:t>
+            </a:r>
+            <a:endParaRPr lang="en-US" sz="1500" dirty="0"/>
           </a:p>
         </p:txBody>
       </p:sp>
@@ -5973,7 +5973,7 @@
               <a:buNone/>
             </a:pPr>
             <a:r>
-              <a:rPr lang="en-US" sz="1700" dirty="0">
+              <a:rPr lang="en-US" sz="1500" dirty="0">
                 <a:solidFill>
                   <a:srgbClr val="FFFFFF"/>
                 </a:solidFill>
@@ -5981,9 +5981,9 @@
                 <a:ea typeface="Arial" pitchFamily="34" charset="-122"/>
                 <a:cs typeface="Arial" pitchFamily="34" charset="-120"/>
               </a:rPr>
-              <a:t>Food source: ugali; consequence of deficiency: scurvy</a:t>
-            </a:r>
-            <a:endParaRPr lang="en-US" sz="1700" dirty="0"/>
+              <a:t>It is a carbohydrate that is used up as it digests starch</a:t>
+            </a:r>
+            <a:endParaRPr lang="en-US" sz="1500" dirty="0"/>
           </a:p>
         </p:txBody>
       </p:sp>
@@ -6073,7 +6073,7 @@
               <a:buNone/>
             </a:pPr>
             <a:r>
-              <a:rPr lang="en-US" sz="1700" dirty="0">
+              <a:rPr lang="en-US" sz="1500" dirty="0">
                 <a:solidFill>
                   <a:srgbClr val="FFFFFF"/>
                 </a:solidFill>
@@ -6081,9 +6081,9 @@
                 <a:ea typeface="Arial" pitchFamily="34" charset="-122"/>
                 <a:cs typeface="Arial" pitchFamily="34" charset="-120"/>
               </a:rPr>
-              <a:t>Food source: ugali; consequence of deficiency: anaemia</a:t>
-            </a:r>
-            <a:endParaRPr lang="en-US" sz="1700" dirty="0"/>
+              <a:t>It is a mineral salt that works best at 0 degrees C</a:t>
+            </a:r>
+            <a:endParaRPr lang="en-US" sz="1500" dirty="0"/>
           </a:p>
         </p:txBody>
       </p:sp>
